--- a/static/img/project_tiles/project_image_bag/VC_animation.pptx
+++ b/static/img/project_tiles/project_image_bag/VC_animation.pptx
@@ -13,7 +13,7 @@
     <a:defPPr>
       <a:defRPr lang="en-US"/>
     </a:defPPr>
-    <a:lvl1pPr marL="0" algn="l" defTabSz="457200" rtl="0" eaLnBrk="1" latinLnBrk="0" hangingPunct="1">
+    <a:lvl1pPr marL="0" algn="l" defTabSz="457192" rtl="0" eaLnBrk="1" latinLnBrk="0" hangingPunct="1">
       <a:defRPr sz="1800" kern="1200">
         <a:solidFill>
           <a:schemeClr val="tx1"/>
@@ -23,7 +23,7 @@
         <a:cs typeface="+mn-cs"/>
       </a:defRPr>
     </a:lvl1pPr>
-    <a:lvl2pPr marL="457200" algn="l" defTabSz="457200" rtl="0" eaLnBrk="1" latinLnBrk="0" hangingPunct="1">
+    <a:lvl2pPr marL="457192" algn="l" defTabSz="457192" rtl="0" eaLnBrk="1" latinLnBrk="0" hangingPunct="1">
       <a:defRPr sz="1800" kern="1200">
         <a:solidFill>
           <a:schemeClr val="tx1"/>
@@ -33,7 +33,7 @@
         <a:cs typeface="+mn-cs"/>
       </a:defRPr>
     </a:lvl2pPr>
-    <a:lvl3pPr marL="914400" algn="l" defTabSz="457200" rtl="0" eaLnBrk="1" latinLnBrk="0" hangingPunct="1">
+    <a:lvl3pPr marL="914384" algn="l" defTabSz="457192" rtl="0" eaLnBrk="1" latinLnBrk="0" hangingPunct="1">
       <a:defRPr sz="1800" kern="1200">
         <a:solidFill>
           <a:schemeClr val="tx1"/>
@@ -43,7 +43,7 @@
         <a:cs typeface="+mn-cs"/>
       </a:defRPr>
     </a:lvl3pPr>
-    <a:lvl4pPr marL="1371600" algn="l" defTabSz="457200" rtl="0" eaLnBrk="1" latinLnBrk="0" hangingPunct="1">
+    <a:lvl4pPr marL="1371576" algn="l" defTabSz="457192" rtl="0" eaLnBrk="1" latinLnBrk="0" hangingPunct="1">
       <a:defRPr sz="1800" kern="1200">
         <a:solidFill>
           <a:schemeClr val="tx1"/>
@@ -53,7 +53,7 @@
         <a:cs typeface="+mn-cs"/>
       </a:defRPr>
     </a:lvl4pPr>
-    <a:lvl5pPr marL="1828800" algn="l" defTabSz="457200" rtl="0" eaLnBrk="1" latinLnBrk="0" hangingPunct="1">
+    <a:lvl5pPr marL="1828768" algn="l" defTabSz="457192" rtl="0" eaLnBrk="1" latinLnBrk="0" hangingPunct="1">
       <a:defRPr sz="1800" kern="1200">
         <a:solidFill>
           <a:schemeClr val="tx1"/>
@@ -63,7 +63,7 @@
         <a:cs typeface="+mn-cs"/>
       </a:defRPr>
     </a:lvl5pPr>
-    <a:lvl6pPr marL="2286000" algn="l" defTabSz="457200" rtl="0" eaLnBrk="1" latinLnBrk="0" hangingPunct="1">
+    <a:lvl6pPr marL="2285960" algn="l" defTabSz="457192" rtl="0" eaLnBrk="1" latinLnBrk="0" hangingPunct="1">
       <a:defRPr sz="1800" kern="1200">
         <a:solidFill>
           <a:schemeClr val="tx1"/>
@@ -73,7 +73,7 @@
         <a:cs typeface="+mn-cs"/>
       </a:defRPr>
     </a:lvl6pPr>
-    <a:lvl7pPr marL="2743200" algn="l" defTabSz="457200" rtl="0" eaLnBrk="1" latinLnBrk="0" hangingPunct="1">
+    <a:lvl7pPr marL="2743152" algn="l" defTabSz="457192" rtl="0" eaLnBrk="1" latinLnBrk="0" hangingPunct="1">
       <a:defRPr sz="1800" kern="1200">
         <a:solidFill>
           <a:schemeClr val="tx1"/>
@@ -83,7 +83,7 @@
         <a:cs typeface="+mn-cs"/>
       </a:defRPr>
     </a:lvl7pPr>
-    <a:lvl8pPr marL="3200400" algn="l" defTabSz="457200" rtl="0" eaLnBrk="1" latinLnBrk="0" hangingPunct="1">
+    <a:lvl8pPr marL="3200344" algn="l" defTabSz="457192" rtl="0" eaLnBrk="1" latinLnBrk="0" hangingPunct="1">
       <a:defRPr sz="1800" kern="1200">
         <a:solidFill>
           <a:schemeClr val="tx1"/>
@@ -93,7 +93,7 @@
         <a:cs typeface="+mn-cs"/>
       </a:defRPr>
     </a:lvl8pPr>
-    <a:lvl9pPr marL="3657600" algn="l" defTabSz="457200" rtl="0" eaLnBrk="1" latinLnBrk="0" hangingPunct="1">
+    <a:lvl9pPr marL="3657536" algn="l" defTabSz="457192" rtl="0" eaLnBrk="1" latinLnBrk="0" hangingPunct="1">
       <a:defRPr sz="1800" kern="1200">
         <a:solidFill>
           <a:schemeClr val="tx1"/>
@@ -141,7 +141,7 @@
         </p:nvSpPr>
         <p:spPr>
           <a:xfrm>
-            <a:off x="548640" y="1197187"/>
+            <a:off x="548641" y="1197188"/>
             <a:ext cx="6217920" cy="2546773"/>
           </a:xfrm>
         </p:spPr>
@@ -173,7 +173,7 @@
         </p:nvSpPr>
         <p:spPr>
           <a:xfrm>
-            <a:off x="914400" y="3842174"/>
+            <a:off x="914401" y="3842174"/>
             <a:ext cx="5486400" cy="1766146"/>
           </a:xfrm>
         </p:spPr>
@@ -184,35 +184,35 @@
               <a:buNone/>
               <a:defRPr sz="1920"/>
             </a:lvl1pPr>
-            <a:lvl2pPr marL="365760" indent="0" algn="ctr">
+            <a:lvl2pPr marL="365794" indent="0" algn="ctr">
               <a:buNone/>
               <a:defRPr sz="1600"/>
             </a:lvl2pPr>
-            <a:lvl3pPr marL="731520" indent="0" algn="ctr">
+            <a:lvl3pPr marL="731588" indent="0" algn="ctr">
               <a:buNone/>
               <a:defRPr sz="1440"/>
             </a:lvl3pPr>
-            <a:lvl4pPr marL="1097280" indent="0" algn="ctr">
+            <a:lvl4pPr marL="1097381" indent="0" algn="ctr">
               <a:buNone/>
               <a:defRPr sz="1280"/>
             </a:lvl4pPr>
-            <a:lvl5pPr marL="1463040" indent="0" algn="ctr">
+            <a:lvl5pPr marL="1463175" indent="0" algn="ctr">
               <a:buNone/>
               <a:defRPr sz="1280"/>
             </a:lvl5pPr>
-            <a:lvl6pPr marL="1828800" indent="0" algn="ctr">
+            <a:lvl6pPr marL="1828969" indent="0" algn="ctr">
               <a:buNone/>
               <a:defRPr sz="1280"/>
             </a:lvl6pPr>
-            <a:lvl7pPr marL="2194560" indent="0" algn="ctr">
+            <a:lvl7pPr marL="2194763" indent="0" algn="ctr">
               <a:buNone/>
               <a:defRPr sz="1280"/>
             </a:lvl7pPr>
-            <a:lvl8pPr marL="2560320" indent="0" algn="ctr">
+            <a:lvl8pPr marL="2560556" indent="0" algn="ctr">
               <a:buNone/>
               <a:defRPr sz="1280"/>
             </a:lvl8pPr>
-            <a:lvl9pPr marL="2926080" indent="0" algn="ctr">
+            <a:lvl9pPr marL="2926350" indent="0" algn="ctr">
               <a:buNone/>
               <a:defRPr sz="1280"/>
             </a:lvl9pPr>
@@ -243,7 +243,7 @@
           <a:p>
             <a:fld id="{DE8D9AFB-DC08-40E0-9969-ECD54231B75C}" type="datetimeFigureOut">
               <a:rPr lang="en-IN" smtClean="0"/>
-              <a:t>08-08-2023</a:t>
+              <a:t>10-08-2023</a:t>
             </a:fld>
             <a:endParaRPr lang="en-IN"/>
           </a:p>
@@ -413,7 +413,7 @@
           <a:p>
             <a:fld id="{DE8D9AFB-DC08-40E0-9969-ECD54231B75C}" type="datetimeFigureOut">
               <a:rPr lang="en-IN" smtClean="0"/>
-              <a:t>08-08-2023</a:t>
+              <a:t>10-08-2023</a:t>
             </a:fld>
             <a:endParaRPr lang="en-IN"/>
           </a:p>
@@ -503,7 +503,7 @@
         </p:nvSpPr>
         <p:spPr>
           <a:xfrm>
-            <a:off x="5234940" y="389467"/>
+            <a:off x="5234940" y="389468"/>
             <a:ext cx="1577340" cy="6199294"/>
           </a:xfrm>
         </p:spPr>
@@ -531,7 +531,7 @@
         </p:nvSpPr>
         <p:spPr>
           <a:xfrm>
-            <a:off x="502920" y="389467"/>
+            <a:off x="502920" y="389468"/>
             <a:ext cx="4640580" cy="6199294"/>
           </a:xfrm>
         </p:spPr>
@@ -593,7 +593,7 @@
           <a:p>
             <a:fld id="{DE8D9AFB-DC08-40E0-9969-ECD54231B75C}" type="datetimeFigureOut">
               <a:rPr lang="en-IN" smtClean="0"/>
-              <a:t>08-08-2023</a:t>
+              <a:t>10-08-2023</a:t>
             </a:fld>
             <a:endParaRPr lang="en-IN"/>
           </a:p>
@@ -763,7 +763,7 @@
           <a:p>
             <a:fld id="{DE8D9AFB-DC08-40E0-9969-ECD54231B75C}" type="datetimeFigureOut">
               <a:rPr lang="en-IN" smtClean="0"/>
-              <a:t>08-08-2023</a:t>
+              <a:t>10-08-2023</a:t>
             </a:fld>
             <a:endParaRPr lang="en-IN"/>
           </a:p>
@@ -853,7 +853,7 @@
         </p:nvSpPr>
         <p:spPr>
           <a:xfrm>
-            <a:off x="499110" y="1823722"/>
+            <a:off x="499110" y="1823723"/>
             <a:ext cx="6309360" cy="3042919"/>
           </a:xfrm>
         </p:spPr>
@@ -885,7 +885,7 @@
         </p:nvSpPr>
         <p:spPr>
           <a:xfrm>
-            <a:off x="499110" y="4895429"/>
+            <a:off x="499110" y="4895430"/>
             <a:ext cx="6309360" cy="1600199"/>
           </a:xfrm>
         </p:spPr>
@@ -900,7 +900,7 @@
                 </a:solidFill>
               </a:defRPr>
             </a:lvl1pPr>
-            <a:lvl2pPr marL="365760" indent="0">
+            <a:lvl2pPr marL="365794" indent="0">
               <a:buNone/>
               <a:defRPr sz="1600">
                 <a:solidFill>
@@ -910,7 +910,7 @@
                 </a:solidFill>
               </a:defRPr>
             </a:lvl2pPr>
-            <a:lvl3pPr marL="731520" indent="0">
+            <a:lvl3pPr marL="731588" indent="0">
               <a:buNone/>
               <a:defRPr sz="1440">
                 <a:solidFill>
@@ -920,7 +920,7 @@
                 </a:solidFill>
               </a:defRPr>
             </a:lvl3pPr>
-            <a:lvl4pPr marL="1097280" indent="0">
+            <a:lvl4pPr marL="1097381" indent="0">
               <a:buNone/>
               <a:defRPr sz="1280">
                 <a:solidFill>
@@ -930,7 +930,7 @@
                 </a:solidFill>
               </a:defRPr>
             </a:lvl4pPr>
-            <a:lvl5pPr marL="1463040" indent="0">
+            <a:lvl5pPr marL="1463175" indent="0">
               <a:buNone/>
               <a:defRPr sz="1280">
                 <a:solidFill>
@@ -940,7 +940,7 @@
                 </a:solidFill>
               </a:defRPr>
             </a:lvl5pPr>
-            <a:lvl6pPr marL="1828800" indent="0">
+            <a:lvl6pPr marL="1828969" indent="0">
               <a:buNone/>
               <a:defRPr sz="1280">
                 <a:solidFill>
@@ -950,7 +950,7 @@
                 </a:solidFill>
               </a:defRPr>
             </a:lvl6pPr>
-            <a:lvl7pPr marL="2194560" indent="0">
+            <a:lvl7pPr marL="2194763" indent="0">
               <a:buNone/>
               <a:defRPr sz="1280">
                 <a:solidFill>
@@ -960,7 +960,7 @@
                 </a:solidFill>
               </a:defRPr>
             </a:lvl7pPr>
-            <a:lvl8pPr marL="2560320" indent="0">
+            <a:lvl8pPr marL="2560556" indent="0">
               <a:buNone/>
               <a:defRPr sz="1280">
                 <a:solidFill>
@@ -970,7 +970,7 @@
                 </a:solidFill>
               </a:defRPr>
             </a:lvl8pPr>
-            <a:lvl9pPr marL="2926080" indent="0">
+            <a:lvl9pPr marL="2926350" indent="0">
               <a:buNone/>
               <a:defRPr sz="1280">
                 <a:solidFill>
@@ -1007,7 +1007,7 @@
           <a:p>
             <a:fld id="{DE8D9AFB-DC08-40E0-9969-ECD54231B75C}" type="datetimeFigureOut">
               <a:rPr lang="en-IN" smtClean="0"/>
-              <a:t>08-08-2023</a:t>
+              <a:t>10-08-2023</a:t>
             </a:fld>
             <a:endParaRPr lang="en-IN"/>
           </a:p>
@@ -1120,7 +1120,7 @@
         </p:nvSpPr>
         <p:spPr>
           <a:xfrm>
-            <a:off x="502920" y="1947333"/>
+            <a:off x="502920" y="1947334"/>
             <a:ext cx="3108960" cy="4641427"/>
           </a:xfrm>
         </p:spPr>
@@ -1177,7 +1177,7 @@
         </p:nvSpPr>
         <p:spPr>
           <a:xfrm>
-            <a:off x="3703320" y="1947333"/>
+            <a:off x="3703320" y="1947334"/>
             <a:ext cx="3108960" cy="4641427"/>
           </a:xfrm>
         </p:spPr>
@@ -1239,7 +1239,7 @@
           <a:p>
             <a:fld id="{DE8D9AFB-DC08-40E0-9969-ECD54231B75C}" type="datetimeFigureOut">
               <a:rPr lang="en-IN" smtClean="0"/>
-              <a:t>08-08-2023</a:t>
+              <a:t>10-08-2023</a:t>
             </a:fld>
             <a:endParaRPr lang="en-IN"/>
           </a:p>
@@ -1329,7 +1329,7 @@
         </p:nvSpPr>
         <p:spPr>
           <a:xfrm>
-            <a:off x="503873" y="389468"/>
+            <a:off x="503874" y="389468"/>
             <a:ext cx="6309360" cy="1413934"/>
           </a:xfrm>
         </p:spPr>
@@ -1368,35 +1368,35 @@
               <a:buNone/>
               <a:defRPr sz="1920" b="1"/>
             </a:lvl1pPr>
-            <a:lvl2pPr marL="365760" indent="0">
+            <a:lvl2pPr marL="365794" indent="0">
               <a:buNone/>
               <a:defRPr sz="1600" b="1"/>
             </a:lvl2pPr>
-            <a:lvl3pPr marL="731520" indent="0">
+            <a:lvl3pPr marL="731588" indent="0">
               <a:buNone/>
               <a:defRPr sz="1440" b="1"/>
             </a:lvl3pPr>
-            <a:lvl4pPr marL="1097280" indent="0">
+            <a:lvl4pPr marL="1097381" indent="0">
               <a:buNone/>
               <a:defRPr sz="1280" b="1"/>
             </a:lvl4pPr>
-            <a:lvl5pPr marL="1463040" indent="0">
+            <a:lvl5pPr marL="1463175" indent="0">
               <a:buNone/>
               <a:defRPr sz="1280" b="1"/>
             </a:lvl5pPr>
-            <a:lvl6pPr marL="1828800" indent="0">
+            <a:lvl6pPr marL="1828969" indent="0">
               <a:buNone/>
               <a:defRPr sz="1280" b="1"/>
             </a:lvl6pPr>
-            <a:lvl7pPr marL="2194560" indent="0">
+            <a:lvl7pPr marL="2194763" indent="0">
               <a:buNone/>
               <a:defRPr sz="1280" b="1"/>
             </a:lvl7pPr>
-            <a:lvl8pPr marL="2560320" indent="0">
+            <a:lvl8pPr marL="2560556" indent="0">
               <a:buNone/>
               <a:defRPr sz="1280" b="1"/>
             </a:lvl8pPr>
-            <a:lvl9pPr marL="2926080" indent="0">
+            <a:lvl9pPr marL="2926350" indent="0">
               <a:buNone/>
               <a:defRPr sz="1280" b="1"/>
             </a:lvl9pPr>
@@ -1422,7 +1422,7 @@
         </p:nvSpPr>
         <p:spPr>
           <a:xfrm>
-            <a:off x="503874" y="2672080"/>
+            <a:off x="503874" y="2672081"/>
             <a:ext cx="3094672" cy="3930227"/>
           </a:xfrm>
         </p:spPr>
@@ -1479,7 +1479,7 @@
         </p:nvSpPr>
         <p:spPr>
           <a:xfrm>
-            <a:off x="3703320" y="1793241"/>
+            <a:off x="3703321" y="1793241"/>
             <a:ext cx="3109913" cy="878839"/>
           </a:xfrm>
         </p:spPr>
@@ -1490,35 +1490,35 @@
               <a:buNone/>
               <a:defRPr sz="1920" b="1"/>
             </a:lvl1pPr>
-            <a:lvl2pPr marL="365760" indent="0">
+            <a:lvl2pPr marL="365794" indent="0">
               <a:buNone/>
               <a:defRPr sz="1600" b="1"/>
             </a:lvl2pPr>
-            <a:lvl3pPr marL="731520" indent="0">
+            <a:lvl3pPr marL="731588" indent="0">
               <a:buNone/>
               <a:defRPr sz="1440" b="1"/>
             </a:lvl3pPr>
-            <a:lvl4pPr marL="1097280" indent="0">
+            <a:lvl4pPr marL="1097381" indent="0">
               <a:buNone/>
               <a:defRPr sz="1280" b="1"/>
             </a:lvl4pPr>
-            <a:lvl5pPr marL="1463040" indent="0">
+            <a:lvl5pPr marL="1463175" indent="0">
               <a:buNone/>
               <a:defRPr sz="1280" b="1"/>
             </a:lvl5pPr>
-            <a:lvl6pPr marL="1828800" indent="0">
+            <a:lvl6pPr marL="1828969" indent="0">
               <a:buNone/>
               <a:defRPr sz="1280" b="1"/>
             </a:lvl6pPr>
-            <a:lvl7pPr marL="2194560" indent="0">
+            <a:lvl7pPr marL="2194763" indent="0">
               <a:buNone/>
               <a:defRPr sz="1280" b="1"/>
             </a:lvl7pPr>
-            <a:lvl8pPr marL="2560320" indent="0">
+            <a:lvl8pPr marL="2560556" indent="0">
               <a:buNone/>
               <a:defRPr sz="1280" b="1"/>
             </a:lvl8pPr>
-            <a:lvl9pPr marL="2926080" indent="0">
+            <a:lvl9pPr marL="2926350" indent="0">
               <a:buNone/>
               <a:defRPr sz="1280" b="1"/>
             </a:lvl9pPr>
@@ -1544,7 +1544,7 @@
         </p:nvSpPr>
         <p:spPr>
           <a:xfrm>
-            <a:off x="3703320" y="2672080"/>
+            <a:off x="3703321" y="2672081"/>
             <a:ext cx="3109913" cy="3930227"/>
           </a:xfrm>
         </p:spPr>
@@ -1606,7 +1606,7 @@
           <a:p>
             <a:fld id="{DE8D9AFB-DC08-40E0-9969-ECD54231B75C}" type="datetimeFigureOut">
               <a:rPr lang="en-IN" smtClean="0"/>
-              <a:t>08-08-2023</a:t>
+              <a:t>10-08-2023</a:t>
             </a:fld>
             <a:endParaRPr lang="en-IN"/>
           </a:p>
@@ -1724,7 +1724,7 @@
           <a:p>
             <a:fld id="{DE8D9AFB-DC08-40E0-9969-ECD54231B75C}" type="datetimeFigureOut">
               <a:rPr lang="en-IN" smtClean="0"/>
-              <a:t>08-08-2023</a:t>
+              <a:t>10-08-2023</a:t>
             </a:fld>
             <a:endParaRPr lang="en-IN"/>
           </a:p>
@@ -1819,7 +1819,7 @@
           <a:p>
             <a:fld id="{DE8D9AFB-DC08-40E0-9969-ECD54231B75C}" type="datetimeFigureOut">
               <a:rPr lang="en-IN" smtClean="0"/>
-              <a:t>08-08-2023</a:t>
+              <a:t>10-08-2023</a:t>
             </a:fld>
             <a:endParaRPr lang="en-IN"/>
           </a:p>
@@ -1909,7 +1909,7 @@
         </p:nvSpPr>
         <p:spPr>
           <a:xfrm>
-            <a:off x="503873" y="487680"/>
+            <a:off x="503874" y="487681"/>
             <a:ext cx="2359342" cy="1706880"/>
           </a:xfrm>
         </p:spPr>
@@ -2026,7 +2026,7 @@
         </p:nvSpPr>
         <p:spPr>
           <a:xfrm>
-            <a:off x="503873" y="2194560"/>
+            <a:off x="503874" y="2194560"/>
             <a:ext cx="2359342" cy="4065694"/>
           </a:xfrm>
         </p:spPr>
@@ -2037,35 +2037,35 @@
               <a:buNone/>
               <a:defRPr sz="1280"/>
             </a:lvl1pPr>
-            <a:lvl2pPr marL="365760" indent="0">
+            <a:lvl2pPr marL="365794" indent="0">
               <a:buNone/>
               <a:defRPr sz="1120"/>
             </a:lvl2pPr>
-            <a:lvl3pPr marL="731520" indent="0">
+            <a:lvl3pPr marL="731588" indent="0">
               <a:buNone/>
               <a:defRPr sz="960"/>
             </a:lvl3pPr>
-            <a:lvl4pPr marL="1097280" indent="0">
+            <a:lvl4pPr marL="1097381" indent="0">
               <a:buNone/>
               <a:defRPr sz="800"/>
             </a:lvl4pPr>
-            <a:lvl5pPr marL="1463040" indent="0">
+            <a:lvl5pPr marL="1463175" indent="0">
               <a:buNone/>
               <a:defRPr sz="800"/>
             </a:lvl5pPr>
-            <a:lvl6pPr marL="1828800" indent="0">
+            <a:lvl6pPr marL="1828969" indent="0">
               <a:buNone/>
               <a:defRPr sz="800"/>
             </a:lvl6pPr>
-            <a:lvl7pPr marL="2194560" indent="0">
+            <a:lvl7pPr marL="2194763" indent="0">
               <a:buNone/>
               <a:defRPr sz="800"/>
             </a:lvl7pPr>
-            <a:lvl8pPr marL="2560320" indent="0">
+            <a:lvl8pPr marL="2560556" indent="0">
               <a:buNone/>
               <a:defRPr sz="800"/>
             </a:lvl8pPr>
-            <a:lvl9pPr marL="2926080" indent="0">
+            <a:lvl9pPr marL="2926350" indent="0">
               <a:buNone/>
               <a:defRPr sz="800"/>
             </a:lvl9pPr>
@@ -2096,7 +2096,7 @@
           <a:p>
             <a:fld id="{DE8D9AFB-DC08-40E0-9969-ECD54231B75C}" type="datetimeFigureOut">
               <a:rPr lang="en-IN" smtClean="0"/>
-              <a:t>08-08-2023</a:t>
+              <a:t>10-08-2023</a:t>
             </a:fld>
             <a:endParaRPr lang="en-IN"/>
           </a:p>
@@ -2186,7 +2186,7 @@
         </p:nvSpPr>
         <p:spPr>
           <a:xfrm>
-            <a:off x="503873" y="487680"/>
+            <a:off x="503874" y="487681"/>
             <a:ext cx="2359342" cy="1706880"/>
           </a:xfrm>
         </p:spPr>
@@ -2229,35 +2229,35 @@
               <a:buNone/>
               <a:defRPr sz="2560"/>
             </a:lvl1pPr>
-            <a:lvl2pPr marL="365760" indent="0">
+            <a:lvl2pPr marL="365794" indent="0">
               <a:buNone/>
               <a:defRPr sz="2240"/>
             </a:lvl2pPr>
-            <a:lvl3pPr marL="731520" indent="0">
+            <a:lvl3pPr marL="731588" indent="0">
               <a:buNone/>
               <a:defRPr sz="1920"/>
             </a:lvl3pPr>
-            <a:lvl4pPr marL="1097280" indent="0">
+            <a:lvl4pPr marL="1097381" indent="0">
               <a:buNone/>
               <a:defRPr sz="1600"/>
             </a:lvl4pPr>
-            <a:lvl5pPr marL="1463040" indent="0">
+            <a:lvl5pPr marL="1463175" indent="0">
               <a:buNone/>
               <a:defRPr sz="1600"/>
             </a:lvl5pPr>
-            <a:lvl6pPr marL="1828800" indent="0">
+            <a:lvl6pPr marL="1828969" indent="0">
               <a:buNone/>
               <a:defRPr sz="1600"/>
             </a:lvl6pPr>
-            <a:lvl7pPr marL="2194560" indent="0">
+            <a:lvl7pPr marL="2194763" indent="0">
               <a:buNone/>
               <a:defRPr sz="1600"/>
             </a:lvl7pPr>
-            <a:lvl8pPr marL="2560320" indent="0">
+            <a:lvl8pPr marL="2560556" indent="0">
               <a:buNone/>
               <a:defRPr sz="1600"/>
             </a:lvl8pPr>
-            <a:lvl9pPr marL="2926080" indent="0">
+            <a:lvl9pPr marL="2926350" indent="0">
               <a:buNone/>
               <a:defRPr sz="1600"/>
             </a:lvl9pPr>
@@ -2283,7 +2283,7 @@
         </p:nvSpPr>
         <p:spPr>
           <a:xfrm>
-            <a:off x="503873" y="2194560"/>
+            <a:off x="503874" y="2194560"/>
             <a:ext cx="2359342" cy="4065694"/>
           </a:xfrm>
         </p:spPr>
@@ -2294,35 +2294,35 @@
               <a:buNone/>
               <a:defRPr sz="1280"/>
             </a:lvl1pPr>
-            <a:lvl2pPr marL="365760" indent="0">
+            <a:lvl2pPr marL="365794" indent="0">
               <a:buNone/>
               <a:defRPr sz="1120"/>
             </a:lvl2pPr>
-            <a:lvl3pPr marL="731520" indent="0">
+            <a:lvl3pPr marL="731588" indent="0">
               <a:buNone/>
               <a:defRPr sz="960"/>
             </a:lvl3pPr>
-            <a:lvl4pPr marL="1097280" indent="0">
+            <a:lvl4pPr marL="1097381" indent="0">
               <a:buNone/>
               <a:defRPr sz="800"/>
             </a:lvl4pPr>
-            <a:lvl5pPr marL="1463040" indent="0">
+            <a:lvl5pPr marL="1463175" indent="0">
               <a:buNone/>
               <a:defRPr sz="800"/>
             </a:lvl5pPr>
-            <a:lvl6pPr marL="1828800" indent="0">
+            <a:lvl6pPr marL="1828969" indent="0">
               <a:buNone/>
               <a:defRPr sz="800"/>
             </a:lvl6pPr>
-            <a:lvl7pPr marL="2194560" indent="0">
+            <a:lvl7pPr marL="2194763" indent="0">
               <a:buNone/>
               <a:defRPr sz="800"/>
             </a:lvl7pPr>
-            <a:lvl8pPr marL="2560320" indent="0">
+            <a:lvl8pPr marL="2560556" indent="0">
               <a:buNone/>
               <a:defRPr sz="800"/>
             </a:lvl8pPr>
-            <a:lvl9pPr marL="2926080" indent="0">
+            <a:lvl9pPr marL="2926350" indent="0">
               <a:buNone/>
               <a:defRPr sz="800"/>
             </a:lvl9pPr>
@@ -2353,7 +2353,7 @@
           <a:p>
             <a:fld id="{DE8D9AFB-DC08-40E0-9969-ECD54231B75C}" type="datetimeFigureOut">
               <a:rPr lang="en-IN" smtClean="0"/>
-              <a:t>08-08-2023</a:t>
+              <a:t>10-08-2023</a:t>
             </a:fld>
             <a:endParaRPr lang="en-IN"/>
           </a:p>
@@ -2418,9 +2418,14 @@
 <p:sldMaster xmlns:a="http://schemas.openxmlformats.org/drawingml/2006/main" xmlns:r="http://schemas.openxmlformats.org/officeDocument/2006/relationships" xmlns:p="http://schemas.openxmlformats.org/presentationml/2006/main">
   <p:cSld>
     <p:bg>
-      <p:bgRef idx="1001">
-        <a:schemeClr val="bg1"/>
-      </p:bgRef>
+      <p:bgPr>
+        <a:solidFill>
+          <a:schemeClr val="bg1">
+            <a:alpha val="0"/>
+          </a:schemeClr>
+        </a:solidFill>
+        <a:effectLst/>
+      </p:bgPr>
     </p:bg>
     <p:spTree>
       <p:nvGrpSpPr>
@@ -2448,7 +2453,7 @@
         </p:nvSpPr>
         <p:spPr>
           <a:xfrm>
-            <a:off x="502920" y="389468"/>
+            <a:off x="502921" y="389468"/>
             <a:ext cx="6309360" cy="1413934"/>
           </a:xfrm>
           <a:prstGeom prst="rect">
@@ -2481,7 +2486,7 @@
         </p:nvSpPr>
         <p:spPr>
           <a:xfrm>
-            <a:off x="502920" y="1947333"/>
+            <a:off x="502921" y="1947334"/>
             <a:ext cx="6309360" cy="4641427"/>
           </a:xfrm>
           <a:prstGeom prst="rect">
@@ -2543,7 +2548,7 @@
         </p:nvSpPr>
         <p:spPr>
           <a:xfrm>
-            <a:off x="502920" y="6780108"/>
+            <a:off x="502921" y="6780109"/>
             <a:ext cx="1645920" cy="389467"/>
           </a:xfrm>
           <a:prstGeom prst="rect">
@@ -2566,7 +2571,7 @@
           <a:p>
             <a:fld id="{DE8D9AFB-DC08-40E0-9969-ECD54231B75C}" type="datetimeFigureOut">
               <a:rPr lang="en-IN" smtClean="0"/>
-              <a:t>08-08-2023</a:t>
+              <a:t>10-08-2023</a:t>
             </a:fld>
             <a:endParaRPr lang="en-IN"/>
           </a:p>
@@ -2584,7 +2589,7 @@
         </p:nvSpPr>
         <p:spPr>
           <a:xfrm>
-            <a:off x="2423160" y="6780108"/>
+            <a:off x="2423161" y="6780109"/>
             <a:ext cx="2468880" cy="389467"/>
           </a:xfrm>
           <a:prstGeom prst="rect">
@@ -2621,7 +2626,7 @@
         </p:nvSpPr>
         <p:spPr>
           <a:xfrm>
-            <a:off x="5166360" y="6780108"/>
+            <a:off x="5166360" y="6780109"/>
             <a:ext cx="1645920" cy="389467"/>
           </a:xfrm>
           <a:prstGeom prst="rect">
@@ -2673,7 +2678,7 @@
   </p:sldLayoutIdLst>
   <p:txStyles>
     <p:titleStyle>
-      <a:lvl1pPr algn="l" defTabSz="731520" rtl="0" eaLnBrk="1" latinLnBrk="0" hangingPunct="1">
+      <a:lvl1pPr algn="l" defTabSz="731588" rtl="0" eaLnBrk="1" latinLnBrk="0" hangingPunct="1">
         <a:lnSpc>
           <a:spcPct val="90000"/>
         </a:lnSpc>
@@ -2692,7 +2697,7 @@
       </a:lvl1pPr>
     </p:titleStyle>
     <p:bodyStyle>
-      <a:lvl1pPr marL="182880" indent="-182880" algn="l" defTabSz="731520" rtl="0" eaLnBrk="1" latinLnBrk="0" hangingPunct="1">
+      <a:lvl1pPr marL="182896" indent="-182896" algn="l" defTabSz="731588" rtl="0" eaLnBrk="1" latinLnBrk="0" hangingPunct="1">
         <a:lnSpc>
           <a:spcPct val="90000"/>
         </a:lnSpc>
@@ -2710,7 +2715,7 @@
           <a:cs typeface="+mn-cs"/>
         </a:defRPr>
       </a:lvl1pPr>
-      <a:lvl2pPr marL="548640" indent="-182880" algn="l" defTabSz="731520" rtl="0" eaLnBrk="1" latinLnBrk="0" hangingPunct="1">
+      <a:lvl2pPr marL="548691" indent="-182896" algn="l" defTabSz="731588" rtl="0" eaLnBrk="1" latinLnBrk="0" hangingPunct="1">
         <a:lnSpc>
           <a:spcPct val="90000"/>
         </a:lnSpc>
@@ -2728,7 +2733,7 @@
           <a:cs typeface="+mn-cs"/>
         </a:defRPr>
       </a:lvl2pPr>
-      <a:lvl3pPr marL="914400" indent="-182880" algn="l" defTabSz="731520" rtl="0" eaLnBrk="1" latinLnBrk="0" hangingPunct="1">
+      <a:lvl3pPr marL="914485" indent="-182896" algn="l" defTabSz="731588" rtl="0" eaLnBrk="1" latinLnBrk="0" hangingPunct="1">
         <a:lnSpc>
           <a:spcPct val="90000"/>
         </a:lnSpc>
@@ -2746,7 +2751,7 @@
           <a:cs typeface="+mn-cs"/>
         </a:defRPr>
       </a:lvl3pPr>
-      <a:lvl4pPr marL="1280160" indent="-182880" algn="l" defTabSz="731520" rtl="0" eaLnBrk="1" latinLnBrk="0" hangingPunct="1">
+      <a:lvl4pPr marL="1280279" indent="-182896" algn="l" defTabSz="731588" rtl="0" eaLnBrk="1" latinLnBrk="0" hangingPunct="1">
         <a:lnSpc>
           <a:spcPct val="90000"/>
         </a:lnSpc>
@@ -2764,7 +2769,7 @@
           <a:cs typeface="+mn-cs"/>
         </a:defRPr>
       </a:lvl4pPr>
-      <a:lvl5pPr marL="1645920" indent="-182880" algn="l" defTabSz="731520" rtl="0" eaLnBrk="1" latinLnBrk="0" hangingPunct="1">
+      <a:lvl5pPr marL="1646073" indent="-182896" algn="l" defTabSz="731588" rtl="0" eaLnBrk="1" latinLnBrk="0" hangingPunct="1">
         <a:lnSpc>
           <a:spcPct val="90000"/>
         </a:lnSpc>
@@ -2782,7 +2787,7 @@
           <a:cs typeface="+mn-cs"/>
         </a:defRPr>
       </a:lvl5pPr>
-      <a:lvl6pPr marL="2011680" indent="-182880" algn="l" defTabSz="731520" rtl="0" eaLnBrk="1" latinLnBrk="0" hangingPunct="1">
+      <a:lvl6pPr marL="2011866" indent="-182896" algn="l" defTabSz="731588" rtl="0" eaLnBrk="1" latinLnBrk="0" hangingPunct="1">
         <a:lnSpc>
           <a:spcPct val="90000"/>
         </a:lnSpc>
@@ -2800,7 +2805,7 @@
           <a:cs typeface="+mn-cs"/>
         </a:defRPr>
       </a:lvl6pPr>
-      <a:lvl7pPr marL="2377440" indent="-182880" algn="l" defTabSz="731520" rtl="0" eaLnBrk="1" latinLnBrk="0" hangingPunct="1">
+      <a:lvl7pPr marL="2377660" indent="-182896" algn="l" defTabSz="731588" rtl="0" eaLnBrk="1" latinLnBrk="0" hangingPunct="1">
         <a:lnSpc>
           <a:spcPct val="90000"/>
         </a:lnSpc>
@@ -2818,7 +2823,7 @@
           <a:cs typeface="+mn-cs"/>
         </a:defRPr>
       </a:lvl7pPr>
-      <a:lvl8pPr marL="2743200" indent="-182880" algn="l" defTabSz="731520" rtl="0" eaLnBrk="1" latinLnBrk="0" hangingPunct="1">
+      <a:lvl8pPr marL="2743454" indent="-182896" algn="l" defTabSz="731588" rtl="0" eaLnBrk="1" latinLnBrk="0" hangingPunct="1">
         <a:lnSpc>
           <a:spcPct val="90000"/>
         </a:lnSpc>
@@ -2836,7 +2841,7 @@
           <a:cs typeface="+mn-cs"/>
         </a:defRPr>
       </a:lvl8pPr>
-      <a:lvl9pPr marL="3108960" indent="-182880" algn="l" defTabSz="731520" rtl="0" eaLnBrk="1" latinLnBrk="0" hangingPunct="1">
+      <a:lvl9pPr marL="3109248" indent="-182896" algn="l" defTabSz="731588" rtl="0" eaLnBrk="1" latinLnBrk="0" hangingPunct="1">
         <a:lnSpc>
           <a:spcPct val="90000"/>
         </a:lnSpc>
@@ -2859,7 +2864,7 @@
       <a:defPPr>
         <a:defRPr lang="en-US"/>
       </a:defPPr>
-      <a:lvl1pPr marL="0" algn="l" defTabSz="731520" rtl="0" eaLnBrk="1" latinLnBrk="0" hangingPunct="1">
+      <a:lvl1pPr marL="0" algn="l" defTabSz="731588" rtl="0" eaLnBrk="1" latinLnBrk="0" hangingPunct="1">
         <a:defRPr sz="1440" kern="1200">
           <a:solidFill>
             <a:schemeClr val="tx1"/>
@@ -2869,7 +2874,7 @@
           <a:cs typeface="+mn-cs"/>
         </a:defRPr>
       </a:lvl1pPr>
-      <a:lvl2pPr marL="365760" algn="l" defTabSz="731520" rtl="0" eaLnBrk="1" latinLnBrk="0" hangingPunct="1">
+      <a:lvl2pPr marL="365794" algn="l" defTabSz="731588" rtl="0" eaLnBrk="1" latinLnBrk="0" hangingPunct="1">
         <a:defRPr sz="1440" kern="1200">
           <a:solidFill>
             <a:schemeClr val="tx1"/>
@@ -2879,7 +2884,7 @@
           <a:cs typeface="+mn-cs"/>
         </a:defRPr>
       </a:lvl2pPr>
-      <a:lvl3pPr marL="731520" algn="l" defTabSz="731520" rtl="0" eaLnBrk="1" latinLnBrk="0" hangingPunct="1">
+      <a:lvl3pPr marL="731588" algn="l" defTabSz="731588" rtl="0" eaLnBrk="1" latinLnBrk="0" hangingPunct="1">
         <a:defRPr sz="1440" kern="1200">
           <a:solidFill>
             <a:schemeClr val="tx1"/>
@@ -2889,7 +2894,7 @@
           <a:cs typeface="+mn-cs"/>
         </a:defRPr>
       </a:lvl3pPr>
-      <a:lvl4pPr marL="1097280" algn="l" defTabSz="731520" rtl="0" eaLnBrk="1" latinLnBrk="0" hangingPunct="1">
+      <a:lvl4pPr marL="1097381" algn="l" defTabSz="731588" rtl="0" eaLnBrk="1" latinLnBrk="0" hangingPunct="1">
         <a:defRPr sz="1440" kern="1200">
           <a:solidFill>
             <a:schemeClr val="tx1"/>
@@ -2899,7 +2904,7 @@
           <a:cs typeface="+mn-cs"/>
         </a:defRPr>
       </a:lvl4pPr>
-      <a:lvl5pPr marL="1463040" algn="l" defTabSz="731520" rtl="0" eaLnBrk="1" latinLnBrk="0" hangingPunct="1">
+      <a:lvl5pPr marL="1463175" algn="l" defTabSz="731588" rtl="0" eaLnBrk="1" latinLnBrk="0" hangingPunct="1">
         <a:defRPr sz="1440" kern="1200">
           <a:solidFill>
             <a:schemeClr val="tx1"/>
@@ -2909,7 +2914,7 @@
           <a:cs typeface="+mn-cs"/>
         </a:defRPr>
       </a:lvl5pPr>
-      <a:lvl6pPr marL="1828800" algn="l" defTabSz="731520" rtl="0" eaLnBrk="1" latinLnBrk="0" hangingPunct="1">
+      <a:lvl6pPr marL="1828969" algn="l" defTabSz="731588" rtl="0" eaLnBrk="1" latinLnBrk="0" hangingPunct="1">
         <a:defRPr sz="1440" kern="1200">
           <a:solidFill>
             <a:schemeClr val="tx1"/>
@@ -2919,7 +2924,7 @@
           <a:cs typeface="+mn-cs"/>
         </a:defRPr>
       </a:lvl6pPr>
-      <a:lvl7pPr marL="2194560" algn="l" defTabSz="731520" rtl="0" eaLnBrk="1" latinLnBrk="0" hangingPunct="1">
+      <a:lvl7pPr marL="2194763" algn="l" defTabSz="731588" rtl="0" eaLnBrk="1" latinLnBrk="0" hangingPunct="1">
         <a:defRPr sz="1440" kern="1200">
           <a:solidFill>
             <a:schemeClr val="tx1"/>
@@ -2929,7 +2934,7 @@
           <a:cs typeface="+mn-cs"/>
         </a:defRPr>
       </a:lvl7pPr>
-      <a:lvl8pPr marL="2560320" algn="l" defTabSz="731520" rtl="0" eaLnBrk="1" latinLnBrk="0" hangingPunct="1">
+      <a:lvl8pPr marL="2560556" algn="l" defTabSz="731588" rtl="0" eaLnBrk="1" latinLnBrk="0" hangingPunct="1">
         <a:defRPr sz="1440" kern="1200">
           <a:solidFill>
             <a:schemeClr val="tx1"/>
@@ -2939,7 +2944,7 @@
           <a:cs typeface="+mn-cs"/>
         </a:defRPr>
       </a:lvl8pPr>
-      <a:lvl9pPr marL="2926080" algn="l" defTabSz="731520" rtl="0" eaLnBrk="1" latinLnBrk="0" hangingPunct="1">
+      <a:lvl9pPr marL="2926350" algn="l" defTabSz="731588" rtl="0" eaLnBrk="1" latinLnBrk="0" hangingPunct="1">
         <a:defRPr sz="1440" kern="1200">
           <a:solidFill>
             <a:schemeClr val="tx1"/>
@@ -2971,60 +2976,6 @@
           <a:chExt cx="0" cy="0"/>
         </a:xfrm>
       </p:grpSpPr>
-      <p:sp>
-        <p:nvSpPr>
-          <p:cNvPr id="2" name="Rectangle 1">
-            <a:extLst>
-              <a:ext uri="{FF2B5EF4-FFF2-40B4-BE49-F238E27FC236}">
-                <a16:creationId xmlns:a16="http://schemas.microsoft.com/office/drawing/2014/main" id="{EA99392E-B95D-9F1C-B225-3874ACE4F561}"/>
-              </a:ext>
-            </a:extLst>
-          </p:cNvPr>
-          <p:cNvSpPr/>
-          <p:nvPr/>
-        </p:nvSpPr>
-        <p:spPr>
-          <a:xfrm>
-            <a:off x="8680" y="-1"/>
-            <a:ext cx="7306519" cy="7395885"/>
-          </a:xfrm>
-          <a:prstGeom prst="rect">
-            <a:avLst/>
-          </a:prstGeom>
-          <a:solidFill>
-            <a:srgbClr val="647687"/>
-          </a:solidFill>
-          <a:ln w="38100">
-            <a:solidFill>
-              <a:schemeClr val="tx1"/>
-            </a:solidFill>
-          </a:ln>
-        </p:spPr>
-        <p:style>
-          <a:lnRef idx="2">
-            <a:schemeClr val="accent1">
-              <a:shade val="15000"/>
-            </a:schemeClr>
-          </a:lnRef>
-          <a:fillRef idx="1">
-            <a:schemeClr val="accent1"/>
-          </a:fillRef>
-          <a:effectRef idx="0">
-            <a:schemeClr val="accent1"/>
-          </a:effectRef>
-          <a:fontRef idx="minor">
-            <a:schemeClr val="lt1"/>
-          </a:fontRef>
-        </p:style>
-        <p:txBody>
-          <a:bodyPr rtlCol="0" anchor="ctr"/>
-          <a:lstStyle/>
-          <a:p>
-            <a:pPr algn="ctr"/>
-            <a:endParaRPr lang="en-IN"/>
-          </a:p>
-        </p:txBody>
-      </p:sp>
       <p:pic>
         <p:nvPicPr>
           <p:cNvPr id="4" name="Simulation_Clip2">
@@ -3056,7 +3007,7 @@
         <p:spPr>
           <a:xfrm>
             <a:off x="10825" y="3254192"/>
-            <a:ext cx="7288947" cy="4141693"/>
+            <a:ext cx="7288948" cy="4141695"/>
           </a:xfrm>
           <a:prstGeom prst="rect">
             <a:avLst/>
@@ -3090,7 +3041,7 @@
         </p:blipFill>
         <p:spPr>
           <a:xfrm>
-            <a:off x="1171877" y="1981200"/>
+            <a:off x="1171879" y="2043955"/>
             <a:ext cx="4971446" cy="1130227"/>
           </a:xfrm>
           <a:prstGeom prst="rect">
@@ -3112,8 +3063,8 @@
         </p:nvSpPr>
         <p:spPr>
           <a:xfrm>
-            <a:off x="3464983" y="2244397"/>
-            <a:ext cx="699246" cy="642238"/>
+            <a:off x="3464984" y="2307152"/>
+            <a:ext cx="699247" cy="642238"/>
           </a:xfrm>
           <a:prstGeom prst="rect">
             <a:avLst/>
@@ -3168,8 +3119,8 @@
         </p:nvSpPr>
         <p:spPr>
           <a:xfrm>
-            <a:off x="6539703" y="3282711"/>
-            <a:ext cx="760069" cy="259017"/>
+            <a:off x="6539704" y="3282711"/>
+            <a:ext cx="760069" cy="221599"/>
           </a:xfrm>
           <a:prstGeom prst="rect">
             <a:avLst/>
@@ -3212,7 +3163,7 @@
         </p:blipFill>
         <p:spPr>
           <a:xfrm>
-            <a:off x="1023819" y="114169"/>
+            <a:off x="1104501" y="185552"/>
             <a:ext cx="5715798" cy="1724266"/>
           </a:xfrm>
           <a:prstGeom prst="rect">
